--- a/ppt/IndusAI13-Project.pptx
+++ b/ppt/IndusAI13-Project.pptx
@@ -1175,7 +1175,7 @@
           <a:p>
             <a:fld id="{A0ABDEA8-EB22-42D4-B8E2-0C26FFC92FC1}" type="datetimeFigureOut">
               <a:rPr lang="fr-FR" smtClean="0"/>
-              <a:t>27/11/2025</a:t>
+              <a:t>16/12/2025</a:t>
             </a:fld>
             <a:endParaRPr lang="fr-FR"/>
           </a:p>
@@ -9262,22 +9262,6 @@
               <a:rPr lang="fr-FR" dirty="0"/>
               <a:t> ($++)</a:t>
             </a:r>
-          </a:p>
-          <a:p>
-            <a:pPr lvl="1"/>
-            <a:r>
-              <a:rPr lang="fr-FR" dirty="0" err="1"/>
-              <a:t>Scoring</a:t>
-            </a:r>
-            <a:r>
-              <a:rPr lang="fr-FR" dirty="0"/>
-              <a:t> à postériori par renforcement (humain) $++ =&gt; </a:t>
-            </a:r>
-            <a:r>
-              <a:rPr lang="fr-FR" dirty="0" err="1"/>
-              <a:t>ProductOwner</a:t>
-            </a:r>
-            <a:endParaRPr lang="fr-FR" dirty="0"/>
           </a:p>
           <a:p>
             <a:pPr lvl="1"/>
